--- a/readings/lecture1/lecture1.pptx
+++ b/readings/lecture1/lecture1.pptx
@@ -3315,7 +3315,7 @@
                 </a:solidFill>
                 <a:latin typeface="Calibri"/>
               </a:rPr>
-              <a:t>Yu &amp; Barter, Veridical Data Science, Ch. 1–3  (vdsbook.com)</a:t>
+              <a:t>Yu &amp; Barter, Veridical Data Science, Ch. 1-3  (vdsbook.com)</a:t>
             </a:r>
           </a:p>
           <a:p>
@@ -3372,7 +3372,7 @@
                 </a:solidFill>
                 <a:latin typeface="Calibri"/>
               </a:rPr>
-              <a:t>Wallis (1980), The Statistical Research Group, 1942–1945  ·  JASA 75(370)</a:t>
+              <a:t>Wallis (1980), The Statistical Research Group, 1942-1945  ·  JASA 75(370)</a:t>
             </a:r>
           </a:p>
           <a:p>
@@ -3673,7 +3673,7 @@
                 </a:solidFill>
                 <a:latin typeface="Calibri"/>
               </a:rPr>
-              <a:t>— </a:t>
+              <a:t>• </a:t>
             </a:r>
             <a:r>
               <a:rPr sz="1300" b="1">
@@ -3691,7 +3691,7 @@
                 </a:solidFill>
                 <a:latin typeface="Calibri"/>
               </a:rPr>
-              <a:t> Two different kinds of inference are needed. Model plus data — estimation, given the model — is best done by Bayes. Model minus data — residuals, diagnostics, tests of fit — must rest on repeated sampling, “because that's the only way you can discredit the model.”</a:t>
+              <a:t> Two different kinds of inference are needed. Model plus data, meaning estimation given the model, is best done by Bayes. Model minus data, meaning residuals and diagnostics and tests of fit, must rest on repeated sampling, "because that's the only way that in any absolute sense you can discredit the model."</a:t>
             </a:r>
           </a:p>
           <a:p>
@@ -3710,7 +3710,7 @@
                 </a:solidFill>
                 <a:latin typeface="Calibri"/>
               </a:rPr>
-              <a:t>— </a:t>
+              <a:t>• </a:t>
             </a:r>
             <a:r>
               <a:rPr sz="1300" b="1">
@@ -3719,7 +3719,7 @@
                 </a:solidFill>
                 <a:latin typeface="Calibri"/>
               </a:rPr>
-              <a:t>And criticism is the creative half.</a:t>
+              <a:t>Criticism is the creative half.</a:t>
             </a:r>
             <a:r>
               <a:rPr sz="1300">
@@ -3728,7 +3728,7 @@
                 </a:solidFill>
                 <a:latin typeface="Calibri"/>
               </a:rPr>
-              <a:t> “Everything else is just deduction — finding things which were latent in what you already knew.” Looking at discrepancies is where something new is made. Statisticians haven't thought about this enough, “and to the extent they haven't, they have not served science very well.”</a:t>
+              <a:t> "Everything else is just deduction, finding things which were latent in what you already knew." Looking at discrepancies is where something new gets made. Statisticians have not thought about this enough, "and to the extent they haven't, they have not served science very well."</a:t>
             </a:r>
           </a:p>
           <a:p>
@@ -3747,7 +3747,7 @@
                 </a:solidFill>
                 <a:latin typeface="Calibri"/>
               </a:rPr>
-              <a:t>— </a:t>
+              <a:t>• </a:t>
             </a:r>
             <a:r>
               <a:rPr sz="1300" b="1">
@@ -3765,7 +3765,7 @@
                 </a:solidFill>
                 <a:latin typeface="Calibri"/>
               </a:rPr>
-              <a:t> “I don't know why it is that people like to have a oneness about things” — many important things depend on twoness.</a:t>
+              <a:t> "I don't know why it is that people like to have a oneness about things." Many important things depend on twoness.</a:t>
             </a:r>
           </a:p>
           <a:p>
@@ -3784,7 +3784,7 @@
                 </a:solidFill>
                 <a:latin typeface="Calibri"/>
               </a:rPr>
-              <a:t>— </a:t>
+              <a:t>• </a:t>
             </a:r>
             <a:r>
               <a:rPr sz="1300" b="1">
@@ -3802,7 +3802,7 @@
                 </a:solidFill>
                 <a:latin typeface="Calibri"/>
               </a:rPr>
-              <a:t> The symmetry assumption behind the standard nonparametric alternative is very strong, and randomization, not the test statistic, is what actually buys you protection.</a:t>
+              <a:t> The symmetry assumption behind the standard nonparametric alternative is very strong. Randomization, not the test statistic, is what actually buys you protection.</a:t>
             </a:r>
           </a:p>
           <a:p>
@@ -3821,7 +3821,7 @@
                 </a:solidFill>
                 <a:latin typeface="Calibri"/>
               </a:rPr>
-              <a:t>— </a:t>
+              <a:t>• </a:t>
             </a:r>
             <a:r>
               <a:rPr sz="1300" b="1">
@@ -3839,7 +3839,7 @@
                 </a:solidFill>
                 <a:latin typeface="Calibri"/>
               </a:rPr>
-              <a:t> Encouraged — innovation usually comes from application. But: too few willing to get their hands dirty, and a warning drawn from Fisher about not knowing that you don't know. “Take a very humble attitude and listen very carefully.”</a:t>
+              <a:t> Encouraged, because innovation usually comes from application. But too few people are willing to get their hands dirty, and he repeats Fisher's warning about not knowing that you don't know. "Take a very humble attitude and listen very carefully."</a:t>
             </a:r>
           </a:p>
           <a:p>
@@ -3858,7 +3858,7 @@
                 </a:solidFill>
                 <a:latin typeface="Calibri"/>
               </a:rPr>
-              <a:t>— </a:t>
+              <a:t>• </a:t>
             </a:r>
             <a:r>
               <a:rPr sz="1300" b="1">
@@ -3876,7 +3876,7 @@
                 </a:solidFill>
                 <a:latin typeface="Calibri"/>
               </a:rPr>
-              <a:t> Monday night beer sessions at his house: bring a real problem, and resist jumping in with solutions before you understand it.</a:t>
+              <a:t> Monday night beer sessions at his house. Bring a real problem, and resist jumping in with solutions before you understand it.</a:t>
             </a:r>
           </a:p>
         </p:txBody>
@@ -4025,7 +4025,7 @@
                 </a:solidFill>
                 <a:latin typeface="Calibri"/>
               </a:rPr>
-              <a:t>Estimate with Bayes; criticize with sampling theory. Refusing to pick a side is the position.</a:t>
+              <a:t>Estimate with Bayes, criticize with sampling theory. Refusing to pick a side is the position.</a:t>
             </a:r>
           </a:p>
         </p:txBody>
@@ -4179,7 +4179,7 @@
                 </a:solidFill>
                 <a:latin typeface="Calibri"/>
               </a:rPr>
-              <a:t>The Statistical Research Group, 1942–1945</a:t>
+              <a:t>The Statistical Research Group, 1942-1945</a:t>
             </a:r>
           </a:p>
         </p:txBody>
@@ -4221,7 +4221,7 @@
                 </a:solidFill>
                 <a:latin typeface="Calibri"/>
               </a:rPr>
-              <a:t>JASA 75(370):320–330. A Presidentially Invited Address — and, Wallis insists, reminiscence rather than history.</a:t>
+              <a:t>JASA 75(370):320-330. A Presidentially Invited Address. Wallis insists it is reminiscence, not history.</a:t>
             </a:r>
           </a:p>
         </p:txBody>
@@ -4349,7 +4349,7 @@
                 </a:solidFill>
                 <a:latin typeface="Calibri"/>
               </a:rPr>
-              <a:t>— </a:t>
+              <a:t>• </a:t>
             </a:r>
             <a:r>
               <a:rPr sz="1300" b="1">
@@ -4367,7 +4367,7 @@
                 </a:solidFill>
                 <a:latin typeface="Calibri"/>
               </a:rPr>
-              <a:t> Based at Columbia, 1 July 1942 to 30 September 1945, funded by the Applied Mathematics Panel of the NDRC under Warren Weaver. 18 principals and 78 people in all, about 50 at peak; the budget went $80k → $150k → $330k. Offices a block from campus — the building next door held part of the atomic bomb project.</a:t>
+              <a:t> Based at Columbia, 1 July 1942 to 30 September 1945, funded by the Applied Mathematics Panel of the NDRC under Warren Weaver. Eighteen principals and 78 people in all, about 50 at peak. The budget went from $80k to $150k to $330k. Offices sat a block from campus. The building next door held part of the atomic bomb project.</a:t>
             </a:r>
           </a:p>
           <a:p>
@@ -4386,7 +4386,7 @@
                 </a:solidFill>
                 <a:latin typeface="Calibri"/>
               </a:rPr>
-              <a:t>— </a:t>
+              <a:t>• </a:t>
             </a:r>
             <a:r>
               <a:rPr sz="1300" b="1">
@@ -4404,7 +4404,7 @@
                 </a:solidFill>
                 <a:latin typeface="Calibri"/>
               </a:rPr>
-              <a:t> Wallis (director), Hotelling, Wolfowitz, Paulson, Bigelow, Friedman, Wald, Bowker, Savage, Girshick, Mosteller, Eisenhart, Stigler. Later: 8 IMS presidents, 4 ASA presidents, 2 AEA presidents, one Nobel. Recruited “by the old-boy network pure and unabashed.”</a:t>
+              <a:t> Wallis as director, plus Hotelling, Wolfowitz, Paulson, Bigelow, Friedman, Wald, Bowker, Savage, Girshick, Mosteller, Eisenhart and Stigler. Later: eight IMS presidents, four ASA presidents, two AEA presidents, one Nobel. Recruited "by the old-boy network pure and unabashed."</a:t>
             </a:r>
           </a:p>
           <a:p>
@@ -4423,7 +4423,7 @@
                 </a:solidFill>
                 <a:latin typeface="Calibri"/>
               </a:rPr>
-              <a:t>— </a:t>
+              <a:t>• </a:t>
             </a:r>
             <a:r>
               <a:rPr sz="1300" b="1">
@@ -4441,7 +4441,7 @@
                 </a:solidFill>
                 <a:latin typeface="Calibri"/>
               </a:rPr>
-              <a:t> The Panel filtered the Army and Navy, so “we were not at the whim of ignorant or arbitrary clients and were under no pressures to shade our findings.” Yet work “however excellent, was in effect not delivered if it had no influence” — so they had to persuade.</a:t>
+              <a:t> The Panel filtered the Army and Navy, so "we were not at the whim of ignorant or arbitrary clients and were under no pressures to shade our findings." Yet work "however excellent, was in effect not delivered if it had no influence." So they had to persuade.</a:t>
             </a:r>
           </a:p>
           <a:p>
@@ -4460,7 +4460,7 @@
                 </a:solidFill>
                 <a:latin typeface="Calibri"/>
               </a:rPr>
-              <a:t>— </a:t>
+              <a:t>• </a:t>
             </a:r>
             <a:r>
               <a:rPr sz="1300" b="1">
@@ -4478,7 +4478,7 @@
                 </a:solidFill>
                 <a:latin typeface="Calibri"/>
               </a:rPr>
-              <a:t> “Fighter planes entered combat with their machine guns loaded according to Jack Wolfowitz’s recommendations, and maybe the pilots came back or maybe they didn’t.” 572 substantive reports; four books.</a:t>
+              <a:t> "Fighter planes entered combat with their machine guns loaded according to Jack Wolfowitz's recommendations, and maybe the pilots came back or maybe they didn't." 572 substantive reports and four books.</a:t>
             </a:r>
           </a:p>
           <a:p>
@@ -4497,7 +4497,7 @@
                 </a:solidFill>
                 <a:latin typeface="Calibri"/>
               </a:rPr>
-              <a:t>— </a:t>
+              <a:t>• </a:t>
             </a:r>
             <a:r>
               <a:rPr sz="1300" b="1">
@@ -4506,7 +4506,7 @@
                 </a:solidFill>
                 <a:latin typeface="Calibri"/>
               </a:rPr>
-              <a:t>A second thread, from 1942 at Stanford.</a:t>
+              <a:t>A second story, from 1942 at Stanford.</a:t>
             </a:r>
             <a:r>
               <a:rPr sz="1300">
@@ -4515,7 +4515,7 @@
                 </a:solidFill>
                 <a:latin typeface="Calibri"/>
               </a:rPr>
-              <a:t> Wallis wrote to W. Edwards Deming about wartime statistics teaching. Deming replied: “The only useful function of a statistician is to make predictions, and thus to provide a basis for action” — and proposed the short-then-long course design that seeded the national quality-control program.</a:t>
+              <a:t> Wallis wrote to W. Edwards Deming about wartime statistics teaching. Deming replied that "the only useful function of a statistician is to make predictions, and thus to provide a basis for action." He also proposed the short-then-long course design that seeded the national quality-control program.</a:t>
             </a:r>
           </a:p>
         </p:txBody>
@@ -4664,7 +4664,7 @@
                 </a:solidFill>
                 <a:latin typeface="Calibri"/>
               </a:rPr>
-              <a:t>Wallis’s claim: SRG was “a model that has not been equaled of an effective statistical consulting group.”</a:t>
+              <a:t>Wallis's claim: SRG was "a model that has not been equaled of an effective statistical consulting group."</a:t>
             </a:r>
           </a:p>
         </p:txBody>
@@ -4860,7 +4860,7 @@
                 </a:solidFill>
                 <a:latin typeface="Calibri"/>
               </a:rPr>
-              <a:t>April 1943 — reconstructed from a 1950 letter to Weaver and a 1943 memo to Wald found in Wallis’s basement in 1978</a:t>
+              <a:t>April 1943, reconstructed from a 1950 letter to Weaver and a 1943 memo to Wald found in Wallis's basement in 1978</a:t>
             </a:r>
           </a:p>
         </p:txBody>
@@ -4988,7 +4988,7 @@
                 </a:solidFill>
                 <a:latin typeface="Calibri"/>
               </a:rPr>
-              <a:t>— </a:t>
+              <a:t>• </a:t>
             </a:r>
             <a:r>
               <a:rPr sz="1250" b="1">
@@ -5006,7 +5006,7 @@
                 </a:solidFill>
                 <a:latin typeface="Calibri"/>
               </a:rPr>
-              <a:t> Navy Captain Garret Schuyler asked how large a sample was needed to compare two percentages. The answer ran to many thousands of rounds. He objected that a seasoned ordnance man would see after a few hundred that the test was settled — could there be “some mechanical rule which could be specified in advance” for stopping early?</a:t>
+              <a:t> Navy Captain Garret Schuyler asked how large a sample was needed to compare two percentages. The answer ran to many thousands of rounds. He objected that a seasoned ordnance man would see after a few hundred that the test was settled. Could there be "some mechanical rule which could be specified in advance" for stopping early?</a:t>
             </a:r>
           </a:p>
           <a:p>
@@ -5025,7 +5025,7 @@
                 </a:solidFill>
                 <a:latin typeface="Calibri"/>
               </a:rPr>
-              <a:t>— </a:t>
+              <a:t>• </a:t>
             </a:r>
             <a:r>
               <a:rPr sz="1250" b="1">
@@ -5043,7 +5043,7 @@
                 </a:solidFill>
                 <a:latin typeface="Calibri"/>
               </a:rPr>
-              <a:t> Drawing on his own 1942 paper on compounding probabilities from independent significance tests (“invented, like almost all good ideas in statistics, by R. A. Fisher”), he multiplies successive probabilities under the null and hunts for a critical level.</a:t>
+              <a:t> He goes back to his own 1942 paper on compounding probabilities from independent significance tests, a procedure "invented like almost all good ideas in statistics by R. A. Fisher." He multiplies successive probabilities under the null and hunts for a critical level.</a:t>
             </a:r>
           </a:p>
           <a:p>
@@ -5062,7 +5062,7 @@
                 </a:solidFill>
                 <a:latin typeface="Calibri"/>
               </a:rPr>
-              <a:t>— </a:t>
+              <a:t>• </a:t>
             </a:r>
             <a:r>
               <a:rPr sz="1250" b="1">
@@ -5080,7 +5080,7 @@
                 </a:solidFill>
                 <a:latin typeface="Calibri"/>
               </a:rPr>
-              <a:t> First insight: an ordinary fixed-N test applied sequentially already saves observations. Second: a test designed to exploit stopping could beat the “most powerful” fixed-N test. Friedman built an example on the train to Washington. They called them “supercolossal.”</a:t>
+              <a:t> First insight: an ordinary fixed-N test applied sequentially already saves observations. Second: a test designed to exploit stopping could beat the "most powerful" fixed-N test. Friedman built an example on the train to Washington. They called them "supercolossal."</a:t>
             </a:r>
           </a:p>
           <a:p>
@@ -5099,7 +5099,7 @@
                 </a:solidFill>
                 <a:latin typeface="Calibri"/>
               </a:rPr>
-              <a:t>— </a:t>
+              <a:t>• </a:t>
             </a:r>
             <a:r>
               <a:rPr sz="1250" b="1">
@@ -5117,7 +5117,7 @@
                 </a:solidFill>
                 <a:latin typeface="Calibri"/>
               </a:rPr>
-              <a:t> Wolfowitz was unmoved — a Butler Hall lunch ran from noon to past three without denting him. So they handed it to Wald, having explicitly agreed that “we could never expect much credit, and would have to take our chances on receiving any at all.”</a:t>
+              <a:t> Wolfowitz was unmoved. A Butler Hall lunch ran from noon to past three without denting him. So they handed it to Wald, having agreed that "we could never expect much credit, and would have to take our chances on receiving any at all."</a:t>
             </a:r>
           </a:p>
           <a:p>
@@ -5136,7 +5136,7 @@
                 </a:solidFill>
                 <a:latin typeface="Calibri"/>
               </a:rPr>
-              <a:t>— </a:t>
+              <a:t>• </a:t>
             </a:r>
             <a:r>
               <a:rPr sz="1250" b="1">
@@ -5154,7 +5154,7 @@
                 </a:solidFill>
                 <a:latin typeface="Calibri"/>
               </a:rPr>
-              <a:t> Day 1: noncommittal. Day 2: the idea is logical, but he expects sequential tests will prove less powerful. Day 3: they exist, they are more powerful, and here is how — the sequential probability ratio test. Hotelling supplied the word “sequential.”</a:t>
+              <a:t> Day 1, noncommittal. Day 2, the idea is logical, but he expects sequential tests will prove less powerful. Day 3, they exist, they are more powerful, and here is how. The sequential probability ratio test. Hotelling supplied the word "sequential."</a:t>
             </a:r>
           </a:p>
           <a:p>
@@ -5173,7 +5173,7 @@
                 </a:solidFill>
                 <a:latin typeface="Calibri"/>
               </a:rPr>
-              <a:t>— </a:t>
+              <a:t>• </a:t>
             </a:r>
             <a:r>
               <a:rPr sz="1250" b="1">
@@ -5191,7 +5191,7 @@
                 </a:solidFill>
                 <a:latin typeface="Calibri"/>
               </a:rPr>
-              <a:t> Not the prior work on double sampling or random walks. “The real relationship of Wald’s work to previous work … is to the Neyman–Pearson theory … Wald simply sequentialized it.”</a:t>
+              <a:t> Not the prior work on double sampling or random walks. "The real relationship of Wald's work to previous work ... is to the Neyman-Pearson theory ... Wald simply sequentialized it."</a:t>
             </a:r>
           </a:p>
           <a:p>
@@ -5210,7 +5210,7 @@
                 </a:solidFill>
                 <a:latin typeface="Calibri"/>
               </a:rPr>
-              <a:t>— </a:t>
+              <a:t>• </a:t>
             </a:r>
             <a:r>
               <a:rPr sz="1250" b="1">
@@ -5228,7 +5228,7 @@
                 </a:solidFill>
                 <a:latin typeface="Calibri"/>
               </a:rPr>
-              <a:t> That Wald’s pages were snatched away and classified beyond the reach of an uncleared enemy alien — Wallis made that up himself, as a petulant joke, and it became part of the history of statistics.</a:t>
+              <a:t> The story that Wald's pages were snatched away and classified beyond the reach of an uncleared enemy alien. Wallis made it up himself as a petulant joke, and it became part of the history of statistics.</a:t>
             </a:r>
           </a:p>
         </p:txBody>
@@ -5382,7 +5382,7 @@
                 </a:solidFill>
                 <a:latin typeface="Calibri"/>
               </a:rPr>
-              <a:t>Four threads that run through all six</a:t>
+              <a:t>Four things that run through all six</a:t>
             </a:r>
           </a:p>
         </p:txBody>
@@ -5510,7 +5510,7 @@
                 </a:solidFill>
                 <a:latin typeface="Calibri"/>
               </a:rPr>
-              <a:t>— </a:t>
+              <a:t>• </a:t>
             </a:r>
             <a:r>
               <a:rPr sz="1450" b="1">
@@ -5519,7 +5519,7 @@
                 </a:solidFill>
                 <a:latin typeface="Calibri"/>
               </a:rPr>
-              <a:t>Contact with reality is the source of method, not a downstream application of it.</a:t>
+              <a:t>Contact with reality is the source of method, not a later application of it.</a:t>
             </a:r>
             <a:r>
               <a:rPr sz="1450">
@@ -5528,7 +5528,7 @@
                 </a:solidFill>
                 <a:latin typeface="Calibri"/>
               </a:rPr>
-              <a:t> Fisher at the tea urn, Box in the rubber lab, sequential analysis out of a Navy captain grumbling about wasted ammunition, Yu &amp; Barter's insistence on domain knowledge and shoe-leather work.</a:t>
+              <a:t> Fisher at the tea urn. Box in the rubber lab. Sequential analysis out of a Navy captain grumbling about wasted ammunition. Yu &amp; Barter insisting on domain knowledge and shoe-leather work.</a:t>
             </a:r>
           </a:p>
           <a:p>
@@ -5547,7 +5547,7 @@
                 </a:solidFill>
                 <a:latin typeface="Calibri"/>
               </a:rPr>
-              <a:t>— </a:t>
+              <a:t>• </a:t>
             </a:r>
             <a:r>
               <a:rPr sz="1450" b="1">
@@ -5556,7 +5556,7 @@
                 </a:solidFill>
                 <a:latin typeface="Calibri"/>
               </a:rPr>
-              <a:t>All models are wrong — so the question is always “wrong how, and does it matter?”</a:t>
+              <a:t>All models are wrong, so the question is always "wrong how, and does it matter?"</a:t>
             </a:r>
             <a:r>
               <a:rPr sz="1450">
@@ -5565,7 +5565,7 @@
                 </a:solidFill>
                 <a:latin typeface="Calibri"/>
               </a:rPr>
-              <a:t> Box worries selectively; Yu &amp; Barter operationalize the same instinct as stability analysis across perturbations and judgment calls.</a:t>
+              <a:t> Box worries selectively. Yu &amp; Barter turn the same instinct into stability analysis across perturbations and judgment calls.</a:t>
             </a:r>
           </a:p>
           <a:p>
@@ -5584,7 +5584,7 @@
                 </a:solidFill>
                 <a:latin typeface="Calibri"/>
               </a:rPr>
-              <a:t>— </a:t>
+              <a:t>• </a:t>
             </a:r>
             <a:r>
               <a:rPr sz="1450" b="1">
@@ -5602,7 +5602,7 @@
                 </a:solidFill>
                 <a:latin typeface="Calibri"/>
               </a:rPr>
-              <a:t> Box's residual analysis and his “only half Bayesian” split; Yu &amp; Barter's predictability checks, negative controls, and refusal to treat a found pattern as a conclusion.</a:t>
+              <a:t> Box's residual analysis and his half-Bayesian split. Yu &amp; Barter's predictability checks, negative controls, and refusal to treat a found pattern as a conclusion.</a:t>
             </a:r>
           </a:p>
           <a:p>
@@ -5621,7 +5621,7 @@
                 </a:solidFill>
                 <a:latin typeface="Calibri"/>
               </a:rPr>
-              <a:t>— </a:t>
+              <a:t>• </a:t>
             </a:r>
             <a:r>
               <a:rPr sz="1450" b="1">
@@ -5630,7 +5630,7 @@
                 </a:solidFill>
                 <a:latin typeface="Calibri"/>
               </a:rPr>
-              <a:t>The open loop is the failure mode.</a:t>
+              <a:t>The open loop is how it fails.</a:t>
             </a:r>
             <a:r>
               <a:rPr sz="1450">
@@ -5639,7 +5639,7 @@
                 </a:solidFill>
                 <a:latin typeface="Calibri"/>
               </a:rPr>
-              <a:t> Cookbookery and mathematistry in 1976; data snooping, unreproducible pipelines, and untested algorithms deployed on biased data today. Same disease, new hosts.</a:t>
+              <a:t> Cookbookery and mathematistry in 1976. Data snooping, unreproducible pipelines, and untested algorithms deployed on biased data today. Same disease, new hosts.</a:t>
             </a:r>
           </a:p>
         </p:txBody>
@@ -6070,7 +6070,7 @@
                 </a:solidFill>
                 <a:latin typeface="Calibri"/>
               </a:rPr>
-              <a:t>— </a:t>
+              <a:t>• </a:t>
             </a:r>
             <a:r>
               <a:rPr sz="1450" b="1">
@@ -6079,7 +6079,7 @@
                 </a:solidFill>
                 <a:latin typeface="Calibri"/>
               </a:rPr>
-              <a:t>Ch. 2 sets this as an exercise:</a:t>
+              <a:t>Ch. 2 sets this as an exercise.</a:t>
             </a:r>
             <a:r>
               <a:rPr sz="1450">
@@ -6088,7 +6088,7 @@
                 </a:solidFill>
                 <a:latin typeface="Calibri"/>
               </a:rPr>
-              <a:t> how does Box (1976) map onto the DSLC and PCS? Where does his loop have stages the DSLC doesn't, and vice versa?</a:t>
+              <a:t> How does Box (1976) map onto the DSLC and PCS? Where does his loop have stages the DSLC does not, and the reverse?</a:t>
             </a:r>
           </a:p>
           <a:p>
@@ -6107,7 +6107,7 @@
                 </a:solidFill>
                 <a:latin typeface="Calibri"/>
               </a:rPr>
-              <a:t>— </a:t>
+              <a:t>• </a:t>
             </a:r>
             <a:r>
               <a:rPr sz="1450" b="1">
@@ -6125,7 +6125,7 @@
                 </a:solidFill>
                 <a:latin typeface="Calibri"/>
               </a:rPr>
-              <a:t> or a different thing wearing its clothes? Box would say model-criticism needs repeated sampling — is a stability analysis repeated sampling?</a:t>
+              <a:t> or a different thing wearing its clothes? Box would say model criticism needs repeated sampling. Is a stability analysis repeated sampling?</a:t>
             </a:r>
           </a:p>
           <a:p>
@@ -6144,7 +6144,7 @@
                 </a:solidFill>
                 <a:latin typeface="Calibri"/>
               </a:rPr>
-              <a:t>— </a:t>
+              <a:t>• </a:t>
             </a:r>
             <a:r>
               <a:rPr sz="1450" b="1">
@@ -6181,7 +6181,7 @@
                 </a:solidFill>
                 <a:latin typeface="Calibri"/>
               </a:rPr>
-              <a:t>— </a:t>
+              <a:t>• </a:t>
             </a:r>
             <a:r>
               <a:rPr sz="1450" b="1">
@@ -6199,7 +6199,7 @@
                 </a:solidFill>
                 <a:latin typeface="Calibri"/>
               </a:rPr>
-              <a:t> Is that a strictly weaker guarantee than preregistration, or a different guarantee?</a:t>
+              <a:t> Is that a weaker guarantee than preregistration, or a different one?</a:t>
             </a:r>
           </a:p>
           <a:p>
@@ -6218,7 +6218,7 @@
                 </a:solidFill>
                 <a:latin typeface="Calibri"/>
               </a:rPr>
-              <a:t>— </a:t>
+              <a:t>• </a:t>
             </a:r>
             <a:r>
               <a:rPr sz="1450" b="1">
@@ -6236,7 +6236,7 @@
                 </a:solidFill>
                 <a:latin typeface="Calibri"/>
               </a:rPr>
-              <a:t> Which half does modern data science have, and which is it missing? Note that Yu &amp; Barter's answer to the same problem is procedural — PCS — where Wallis's was institutional.</a:t>
+              <a:t> Which half does modern data science have, and which is it missing? Yu &amp; Barter answer the same problem procedurally, with PCS. Wallis's answer was institutional.</a:t>
             </a:r>
           </a:p>
         </p:txBody>
@@ -6518,7 +6518,7 @@
                 </a:solidFill>
                 <a:latin typeface="Calibri"/>
               </a:rPr>
-              <a:t>— </a:t>
+              <a:t>• </a:t>
             </a:r>
             <a:r>
               <a:rPr sz="1500" b="1">
@@ -6536,7 +6536,7 @@
                 </a:solidFill>
                 <a:latin typeface="Calibri"/>
               </a:rPr>
-              <a:t> sets the standard — what makes a data-driven result trustworthy (PCS).</a:t>
+              <a:t> sets the standard. What makes a data-driven result trustworthy (PCS).</a:t>
             </a:r>
           </a:p>
           <a:p>
@@ -6555,7 +6555,7 @@
                 </a:solidFill>
                 <a:latin typeface="Calibri"/>
               </a:rPr>
-              <a:t>— </a:t>
+              <a:t>• </a:t>
             </a:r>
             <a:r>
               <a:rPr sz="1500" b="1">
@@ -6573,7 +6573,7 @@
                 </a:solidFill>
                 <a:latin typeface="Calibri"/>
               </a:rPr>
-              <a:t> gives the itinerary — the six stages of the data science life cycle.</a:t>
+              <a:t> gives the itinerary, the six stages of the data science life cycle.</a:t>
             </a:r>
           </a:p>
           <a:p>
@@ -6592,7 +6592,7 @@
                 </a:solidFill>
                 <a:latin typeface="Calibri"/>
               </a:rPr>
-              <a:t>— </a:t>
+              <a:t>• </a:t>
             </a:r>
             <a:r>
               <a:rPr sz="1500" b="1">
@@ -6610,7 +6610,7 @@
                 </a:solidFill>
                 <a:latin typeface="Calibri"/>
               </a:rPr>
-              <a:t> gives the discipline — project structure, code, reproducibility.</a:t>
+              <a:t> gives the discipline. Project structure, code, reproducibility.</a:t>
             </a:r>
           </a:p>
           <a:p>
@@ -6629,7 +6629,7 @@
                 </a:solidFill>
                 <a:latin typeface="Calibri"/>
               </a:rPr>
-              <a:t>— </a:t>
+              <a:t>• </a:t>
             </a:r>
             <a:r>
               <a:rPr sz="1500" b="1">
@@ -6647,7 +6647,7 @@
                 </a:solidFill>
                 <a:latin typeface="Calibri"/>
               </a:rPr>
-              <a:t> supplies the philosophy the whole book is built on: science is an iteration between theory and practice, and all models are wrong.</a:t>
+              <a:t> supplies the philosophy the whole book is built on. Science is an iteration between theory and practice, and all models are wrong.</a:t>
             </a:r>
           </a:p>
           <a:p>
@@ -6666,7 +6666,7 @@
                 </a:solidFill>
                 <a:latin typeface="Calibri"/>
               </a:rPr>
-              <a:t>— </a:t>
+              <a:t>• </a:t>
             </a:r>
             <a:r>
               <a:rPr sz="1500" b="1">
@@ -6684,7 +6684,7 @@
                 </a:solidFill>
                 <a:latin typeface="Calibri"/>
               </a:rPr>
-              <a:t> shows that philosophy being lived — Box's own career, told as one long theory–practice loop.</a:t>
+              <a:t> shows that philosophy being lived. Box's own career is one long theory-practice loop.</a:t>
             </a:r>
           </a:p>
           <a:p>
@@ -6703,7 +6703,7 @@
                 </a:solidFill>
                 <a:latin typeface="Calibri"/>
               </a:rPr>
-              <a:t>— </a:t>
+              <a:t>• </a:t>
             </a:r>
             <a:r>
               <a:rPr sz="1500" b="1">
@@ -6721,7 +6721,7 @@
                 </a:solidFill>
                 <a:latin typeface="Calibri"/>
               </a:rPr>
-              <a:t> is the historical case: 18 statisticians, a war, and a stopping rule that fell out of an ordnance officer's complaint.</a:t>
+              <a:t> is the historical case. Eighteen statisticians, a war, and a stopping rule that came out of an ordnance officer's complaint.</a:t>
             </a:r>
           </a:p>
         </p:txBody>
@@ -6870,7 +6870,7 @@
                 </a:solidFill>
                 <a:latin typeface="Calibri"/>
               </a:rPr>
-              <a:t>Yu &amp; Barter formalize what Box argued and Wallis's group demonstrated: methods get their license from practice, not from elegance.</a:t>
+              <a:t>Yu &amp; Barter formalize what Box argued and Wallis's group demonstrated. Methods earn their license from practice, not from elegance.</a:t>
             </a:r>
           </a:p>
         </p:txBody>
@@ -7194,7 +7194,7 @@
                 </a:solidFill>
                 <a:latin typeface="Calibri"/>
               </a:rPr>
-              <a:t>— </a:t>
+              <a:t>• </a:t>
             </a:r>
             <a:r>
               <a:rPr sz="1450" b="1">
@@ -7203,7 +7203,7 @@
                 </a:solidFill>
                 <a:latin typeface="Calibri"/>
               </a:rPr>
-              <a:t>Veridical = truthful.</a:t>
+              <a:t>Veridical means truthful.</a:t>
             </a:r>
             <a:r>
               <a:rPr sz="1450">
@@ -7231,7 +7231,7 @@
                 </a:solidFill>
                 <a:latin typeface="Calibri"/>
               </a:rPr>
-              <a:t>— </a:t>
+              <a:t>• </a:t>
             </a:r>
             <a:r>
               <a:rPr sz="1450" b="1">
@@ -7249,7 +7249,7 @@
                 </a:solidFill>
                 <a:latin typeface="Calibri"/>
               </a:rPr>
-              <a:t> Reality (where we live) → data (an approximation of it) → algorithms (mental constructs). Trustworthiness depends on the strength of the connections between them.</a:t>
+              <a:t> Reality, where we live. Data, an approximation of it. Algorithms, which are mental constructs. Trustworthiness depends on how strong the connections between them are.</a:t>
             </a:r>
           </a:p>
           <a:p>
@@ -7268,7 +7268,7 @@
                 </a:solidFill>
                 <a:latin typeface="Calibri"/>
               </a:rPr>
-              <a:t>— </a:t>
+              <a:t>• </a:t>
             </a:r>
             <a:r>
               <a:rPr sz="1450" b="1">
@@ -7286,7 +7286,7 @@
                 </a:solidFill>
                 <a:latin typeface="Calibri"/>
               </a:rPr>
-              <a:t> Data will not tell you it misrepresents reality; algorithms will not warn you they are being misused. Facial recognition trained on light-skinned faces is the canonical failure.</a:t>
+              <a:t> Data will not tell you it misrepresents reality, and algorithms will not warn you they are being misused. Facial recognition trained mostly on light-skinned faces is the standard example.</a:t>
             </a:r>
           </a:p>
           <a:p>
@@ -7305,7 +7305,7 @@
                 </a:solidFill>
                 <a:latin typeface="Calibri"/>
               </a:rPr>
-              <a:t>— </a:t>
+              <a:t>• </a:t>
             </a:r>
             <a:r>
               <a:rPr sz="1450" b="1">
@@ -7323,7 +7323,7 @@
                 </a:solidFill>
                 <a:latin typeface="Calibri"/>
               </a:rPr>
-              <a:t> Interrogate the domain question (is it even the right, ethical question?), the data (where did it come from? do the shoe-leather work), and the analysis (are the assumptions reasonable?).</a:t>
+              <a:t> Interrogate the domain question. Is it even the right question, and is it ethical? Interrogate the data. Where did it come from, and can you do the shoe-leather work? Interrogate the analysis. Are the assumptions reasonable?</a:t>
             </a:r>
           </a:p>
           <a:p>
@@ -7342,7 +7342,7 @@
                 </a:solidFill>
                 <a:latin typeface="Calibri"/>
               </a:rPr>
-              <a:t>— </a:t>
+              <a:t>• </a:t>
             </a:r>
             <a:r>
               <a:rPr sz="1450" b="1">
@@ -7360,7 +7360,7 @@
                 </a:solidFill>
                 <a:latin typeface="Calibri"/>
               </a:rPr>
-              <a:t> Confirmation bias (not scrutinizing results that match expectations) and desirability bias (finding what others want).</a:t>
+              <a:t> Confirmation bias means you fail to scrutinize results that match your expectations. Desirability bias means you find what you think others want.</a:t>
             </a:r>
           </a:p>
         </p:txBody>
@@ -7509,7 +7509,7 @@
                 </a:solidFill>
                 <a:latin typeface="Calibri"/>
               </a:rPr>
-              <a:t>“There are three kinds of lies: lies, damned lies, and bad statistics.” Most lying with data is unintentional.</a:t>
+              <a:t>"There are three kinds of lies: lies, damned lies, and bad statistics." Most lying with data is unintentional.</a:t>
             </a:r>
           </a:p>
         </p:txBody>
@@ -7791,7 +7791,7 @@
                 </a:solidFill>
                 <a:latin typeface="Calibri"/>
               </a:rPr>
-              <a:t>— </a:t>
+              <a:t>• </a:t>
             </a:r>
             <a:r>
               <a:rPr sz="1400" b="1">
@@ -7809,7 +7809,7 @@
                 </a:solidFill>
                 <a:latin typeface="Calibri"/>
               </a:rPr>
-              <a:t> A reality check. Results should re-emerge in relevant future or external data — or match what the domain already knows. Absent future data, split train / validation / test (~60/20/20) before you explore, using a time-, group-, or random-based split that mirrors how results will be used.</a:t>
+              <a:t> A reality check. Results should reappear in relevant future or external data, or match what the domain already knows. With no future data, split train, validation and test (roughly 60/20/20) before you explore. Choose a time-, group-, or random-based split that mirrors how the results will be used.</a:t>
             </a:r>
           </a:p>
           <a:p>
@@ -7828,7 +7828,7 @@
                 </a:solidFill>
                 <a:latin typeface="Calibri"/>
               </a:rPr>
-              <a:t>— </a:t>
+              <a:t>• </a:t>
             </a:r>
             <a:r>
               <a:rPr sz="1400" b="1">
@@ -7846,7 +7846,7 @@
                 </a:solidFill>
                 <a:latin typeface="Calibri"/>
               </a:rPr>
-              <a:t> The workhorse, mostly in the background: computations should be clear, efficient, scalable, reproducible.</a:t>
+              <a:t> Mostly in the background. Computations should be clear, efficient, scalable and reproducible.</a:t>
             </a:r>
           </a:p>
           <a:p>
@@ -7865,7 +7865,7 @@
                 </a:solidFill>
                 <a:latin typeface="Calibri"/>
               </a:rPr>
-              <a:t>— </a:t>
+              <a:t>• </a:t>
             </a:r>
             <a:r>
               <a:rPr sz="1400" b="1">
@@ -7883,7 +7883,7 @@
                 </a:solidFill>
                 <a:latin typeface="Calibri"/>
               </a:rPr>
-              <a:t> The photograph metaphor — for every dataset you collected there are plausible alternatives you didn't, and every cleaning and modeling choice is a judgment call. Results are stable if they survive reasonable perturbations to the data, the judgment calls, and the algorithm.</a:t>
+              <a:t> Think of a photograph. For every dataset you collected there are plausible alternatives you did not, and every cleaning and modeling choice is a judgment call. Results are stable if they survive reasonable perturbations to the data, the judgment calls, and the algorithm.</a:t>
             </a:r>
           </a:p>
           <a:p>
@@ -7902,7 +7902,7 @@
                 </a:solidFill>
                 <a:latin typeface="Calibri"/>
               </a:rPr>
-              <a:t>— </a:t>
+              <a:t>• </a:t>
             </a:r>
             <a:r>
               <a:rPr sz="1400" b="1">
@@ -7911,7 +7911,7 @@
                 </a:solidFill>
                 <a:latin typeface="Calibri"/>
               </a:rPr>
-              <a:t>What PCS is not.</a:t>
+              <a:t>PCS is not proof.</a:t>
             </a:r>
             <a:r>
               <a:rPr sz="1400">
@@ -7920,7 +7920,7 @@
                 </a:solidFill>
                 <a:latin typeface="Calibri"/>
               </a:rPr>
-              <a:t> Not proof. Echoes Popperian falsification: each check is more evidence, never certainty.</a:t>
+              <a:t> It echoes Popperian falsification. Each check is more evidence, never certainty.</a:t>
             </a:r>
           </a:p>
           <a:p>
@@ -7939,7 +7939,7 @@
                 </a:solidFill>
                 <a:latin typeface="Calibri"/>
               </a:rPr>
-              <a:t>— </a:t>
+              <a:t>• </a:t>
             </a:r>
             <a:r>
               <a:rPr sz="1400" b="1">
@@ -7948,7 +7948,7 @@
                 </a:solidFill>
                 <a:latin typeface="Calibri"/>
               </a:rPr>
-              <a:t>A unification.</a:t>
+              <a:t>It merges two cultures.</a:t>
             </a:r>
             <a:r>
               <a:rPr sz="1400">
@@ -7957,7 +7957,7 @@
                 </a:solidFill>
                 <a:latin typeface="Calibri"/>
               </a:rPr>
-              <a:t> Classical inference asks only how results vary under hypothetical resampling; ML asks only about held-out performance. PCS generalizes and merges both — Breiman's two cultures, made one.</a:t>
+              <a:t> Classical inference asks only how results vary under hypothetical resampling. ML asks only about held-out performance. PCS generalizes both. Breiman's two cultures, made one.</a:t>
             </a:r>
           </a:p>
         </p:txBody>
@@ -8106,7 +8106,7 @@
                 </a:solidFill>
                 <a:latin typeface="Calibri"/>
               </a:rPr>
-              <a:t>Stability is uncertainty quantification widened to include every human judgment call in the pipeline, not just sampling variability.</a:t>
+              <a:t>Stability widens uncertainty quantification to cover every human judgment call in the pipeline, not just sampling variability.</a:t>
             </a:r>
           </a:p>
         </p:txBody>
@@ -8302,7 +8302,7 @@
                 </a:solidFill>
                 <a:latin typeface="Calibri"/>
               </a:rPr>
-              <a:t>Six stages — and it is not a straight line</a:t>
+              <a:t>Six stages, and it is not a straight line</a:t>
             </a:r>
           </a:p>
         </p:txBody>
@@ -8430,7 +8430,7 @@
                 </a:solidFill>
                 <a:latin typeface="Calibri"/>
               </a:rPr>
-              <a:t>— </a:t>
+              <a:t>• </a:t>
             </a:r>
             <a:r>
               <a:rPr sz="1350" b="1">
@@ -8439,7 +8439,7 @@
                 </a:solidFill>
                 <a:latin typeface="Calibri"/>
               </a:rPr>
-              <a:t>1 · Problem formulation &amp; data collection.</a:t>
+              <a:t>1 · Problem formulation and data collection.</a:t>
             </a:r>
             <a:r>
               <a:rPr sz="1350">
@@ -8448,7 +8448,7 @@
                 </a:solidFill>
                 <a:latin typeface="Calibri"/>
               </a:rPr>
-              <a:t> Reformulate a vague domain question into an answerable one. The hospital-infection example: “why have HAI rates risen?” splits into a patient-risk question and a hygiene-practice question that need entirely different data. Prefer live data over dead data.</a:t>
+              <a:t> Reformulate a vague domain question into an answerable one. Take the hospital-infection example. "Why have HAI rates risen?" splits into a patient-risk question and a hygiene-practice question that need entirely different data. Prefer live data over dead data.</a:t>
             </a:r>
           </a:p>
           <a:p>
@@ -8467,7 +8467,7 @@
                 </a:solidFill>
                 <a:latin typeface="Calibri"/>
               </a:rPr>
-              <a:t>— </a:t>
+              <a:t>• </a:t>
             </a:r>
             <a:r>
               <a:rPr sz="1350" b="1">
@@ -8485,7 +8485,7 @@
                 </a:solidFill>
                 <a:latin typeface="Calibri"/>
               </a:rPr>
-              <a:t> Make the data tidy, correctly typed, unambiguous — necessarily subjective. Then explore, then polish exploratory graphics into explanatory ones.</a:t>
+              <a:t> Make the data tidy, correctly typed and unambiguous. All of that is subjective. Then explore, then polish exploratory graphics into explanatory ones.</a:t>
             </a:r>
           </a:p>
           <a:p>
@@ -8504,7 +8504,7 @@
                 </a:solidFill>
                 <a:latin typeface="Calibri"/>
               </a:rPr>
-              <a:t>— </a:t>
+              <a:t>• </a:t>
             </a:r>
             <a:r>
               <a:rPr sz="1350" b="1">
@@ -8541,7 +8541,7 @@
                 </a:solidFill>
                 <a:latin typeface="Calibri"/>
               </a:rPr>
-              <a:t>— </a:t>
+              <a:t>• </a:t>
             </a:r>
             <a:r>
               <a:rPr sz="1350" b="1">
@@ -8550,7 +8550,7 @@
                 </a:solidFill>
                 <a:latin typeface="Calibri"/>
               </a:rPr>
-              <a:t>4 · Prediction and/or inference (optional).</a:t>
+              <a:t>4 · Prediction and inference (optional).</a:t>
             </a:r>
             <a:r>
               <a:rPr sz="1350">
@@ -8559,7 +8559,7 @@
                 </a:solidFill>
                 <a:latin typeface="Calibri"/>
               </a:rPr>
-              <a:t> Supervised learning; or classical estimation and testing.</a:t>
+              <a:t> Supervised learning, or classical estimation and testing.</a:t>
             </a:r>
           </a:p>
           <a:p>
@@ -8578,7 +8578,7 @@
                 </a:solidFill>
                 <a:latin typeface="Calibri"/>
               </a:rPr>
-              <a:t>— </a:t>
+              <a:t>• </a:t>
             </a:r>
             <a:r>
               <a:rPr sz="1350" b="1">
@@ -8596,7 +8596,7 @@
                 </a:solidFill>
                 <a:latin typeface="Calibri"/>
               </a:rPr>
-              <a:t> Critical thinking plus PCS — and use a negative control (show experts fake results alongside real ones) to blunt confirmation bias.</a:t>
+              <a:t> Critical thinking plus PCS. Use a negative control, showing experts fake results alongside real ones, to blunt confirmation bias.</a:t>
             </a:r>
           </a:p>
           <a:p>
@@ -8615,7 +8615,7 @@
                 </a:solidFill>
                 <a:latin typeface="Calibri"/>
               </a:rPr>
-              <a:t>— </a:t>
+              <a:t>• </a:t>
             </a:r>
             <a:r>
               <a:rPr sz="1350" b="1">
@@ -8633,7 +8633,7 @@
                 </a:solidFill>
                 <a:latin typeface="Calibri"/>
               </a:rPr>
-              <a:t> Tailor to the audience; getting results into production is usually the real goal.</a:t>
+              <a:t> Tailor it to the audience. Getting results into production is usually the real goal.</a:t>
             </a:r>
           </a:p>
         </p:txBody>
@@ -8782,7 +8782,7 @@
                 </a:solidFill>
                 <a:latin typeface="Calibri"/>
               </a:rPr>
-              <a:t>Data snooping is answered not by preregistration but by evidence: search freely, then show the finding is predictable and stable.</a:t>
+              <a:t>PCS answers data snooping with evidence rather than preregistration. Search freely, then show the finding is predictable and stable.</a:t>
             </a:r>
           </a:p>
         </p:txBody>
@@ -8936,7 +8936,7 @@
                 </a:solidFill>
                 <a:latin typeface="Calibri"/>
               </a:rPr>
-              <a:t>Setting up the project — and reproducibility</a:t>
+              <a:t>Project setup and reproducibility</a:t>
             </a:r>
           </a:p>
         </p:txBody>
@@ -9106,7 +9106,7 @@
                 </a:solidFill>
                 <a:latin typeface="Calibri"/>
               </a:rPr>
-              <a:t>— </a:t>
+              <a:t>• </a:t>
             </a:r>
             <a:r>
               <a:rPr sz="1350" b="1">
@@ -9124,7 +9124,7 @@
                 </a:solidFill>
                 <a:latin typeface="Calibri"/>
               </a:rPr>
-              <a:t> data/ (raw file plus documentation) and dslc_documentation/ (numbered .qmd or .ipynb per DSLC stage, with a functions/ subfolder), tied together by a README.md. R or Python — the authors lean R, and say neither is universally better.</a:t>
+              <a:t> A data/ folder holds the raw file plus documentation. A dslc_documentation/ folder holds numbered .qmd or .ipynb files, one per DSLC stage, with a functions/ subfolder. A README.md ties it together. R or Python both work. The authors lean R and say neither is universally better.</a:t>
             </a:r>
           </a:p>
           <a:p>
@@ -9143,7 +9143,7 @@
                 </a:solidFill>
                 <a:latin typeface="Calibri"/>
               </a:rPr>
-              <a:t>— </a:t>
+              <a:t>• </a:t>
             </a:r>
             <a:r>
               <a:rPr sz="1350" b="1">
@@ -9161,7 +9161,7 @@
                 </a:solidFill>
                 <a:latin typeface="Calibri"/>
               </a:rPr>
-              <a:t> Don't repeat yourself; follow a style guide (tidyverse or PEP 8); comment liberally; test; get your code reviewed.</a:t>
+              <a:t> Do not repeat yourself. Follow a style guide, tidyverse or PEP 8. Comment liberally, test, and get your code reviewed.</a:t>
             </a:r>
           </a:p>
           <a:p>
@@ -9180,7 +9180,7 @@
                 </a:solidFill>
                 <a:latin typeface="Calibri"/>
               </a:rPr>
-              <a:t>— </a:t>
+              <a:t>• </a:t>
             </a:r>
             <a:r>
               <a:rPr sz="1350" b="1">
@@ -9198,7 +9198,7 @@
                 </a:solidFill>
                 <a:latin typeface="Calibri"/>
               </a:rPr>
-              <a:t> with judgment calls as arguments — that is what makes a stability analysis cheap instead of a copy-paste nightmare.</a:t>
+              <a:t> with the judgment calls as arguments. That is what makes a stability analysis cheap instead of a copy-paste nightmare.</a:t>
             </a:r>
           </a:p>
           <a:p>
@@ -9217,7 +9217,7 @@
                 </a:solidFill>
                 <a:latin typeface="Calibri"/>
               </a:rPr>
-              <a:t>— </a:t>
+              <a:t>• </a:t>
             </a:r>
             <a:r>
               <a:rPr sz="1350" b="1">
@@ -9254,7 +9254,7 @@
                 </a:solidFill>
                 <a:latin typeface="Calibri"/>
               </a:rPr>
-              <a:t>— </a:t>
+              <a:t>• </a:t>
             </a:r>
             <a:r>
               <a:rPr sz="1350" b="1">
@@ -9272,7 +9272,7 @@
                 </a:solidFill>
                 <a:latin typeface="Calibri"/>
               </a:rPr>
-              <a:t> Reinhart &amp; Rogoff (2010) — Excel errors and thin documentation; Herndon et al. got the opposite result. Broader: only ~1/3 to 2/3 of published results reproduce.</a:t>
+              <a:t> Reinhart and Rogoff (2010) had Excel errors and thin documentation. Herndon and colleagues got the opposite result. More broadly, only about a third to two thirds of published results reproduce.</a:t>
             </a:r>
           </a:p>
           <a:p>
@@ -9291,7 +9291,7 @@
                 </a:solidFill>
                 <a:latin typeface="Calibri"/>
               </a:rPr>
-              <a:t>— </a:t>
+              <a:t>• </a:t>
             </a:r>
             <a:r>
               <a:rPr sz="1350" b="1">
@@ -9309,7 +9309,7 @@
                 </a:solidFill>
                 <a:latin typeface="Calibri"/>
               </a:rPr>
-              <a:t> and every rung is a PCS assessment: same code same machine (weak) → new code, new person → independent team with new data (strongest = predictability + stability).</a:t>
+              <a:t> and every rung is a PCS assessment. Same code, same machine is the weak end. Then new code and a new person. Then an independent team with new data, which is predictability and stability together.</a:t>
             </a:r>
           </a:p>
         </p:txBody>
@@ -9458,7 +9458,7 @@
                 </a:solidFill>
                 <a:latin typeface="Calibri"/>
               </a:rPr>
-              <a:t>Reproducibility is not a separate virtue bolted on at the end — it is stability, assessed against code, machine, and analyst.</a:t>
+              <a:t>Reproducibility is not a separate virtue bolted on at the end. It is stability, measured against code, machine and analyst.</a:t>
             </a:r>
           </a:p>
         </p:txBody>
@@ -9612,7 +9612,7 @@
                 </a:solidFill>
                 <a:latin typeface="Calibri"/>
               </a:rPr>
-              <a:t>Science and Statistics — the argument</a:t>
+              <a:t>The argument in Science and Statistics</a:t>
             </a:r>
           </a:p>
         </p:txBody>
@@ -9654,7 +9654,7 @@
                 </a:solidFill>
                 <a:latin typeface="Calibri"/>
               </a:rPr>
-              <a:t>JASA 71(356):791–799. The R. A. Fisher Memorial Lecture.</a:t>
+              <a:t>JASA 71(356):791-799. The R. A. Fisher Memorial Lecture.</a:t>
             </a:r>
           </a:p>
         </p:txBody>
@@ -9782,7 +9782,7 @@
                 </a:solidFill>
                 <a:latin typeface="Calibri"/>
               </a:rPr>
-              <a:t>— </a:t>
+              <a:t>• </a:t>
             </a:r>
             <a:r>
               <a:rPr sz="1400" b="1">
@@ -9800,7 +9800,7 @@
                 </a:solidFill>
                 <a:latin typeface="Calibri"/>
               </a:rPr>
-              <a:t> Learning advances neither by pure speculation nor by piling up facts, but by a motivated loop: facts suggest a tentative theory → deductions clash with facts → the theory is modified → repeat.</a:t>
+              <a:t> Learning advances neither by pure speculation nor by piling up facts, but by a motivated loop. Facts suggest a tentative theory, deductions clash with facts, the theory is modified, repeat.</a:t>
             </a:r>
           </a:p>
           <a:p>
@@ -9819,7 +9819,7 @@
                 </a:solidFill>
                 <a:latin typeface="Calibri"/>
               </a:rPr>
-              <a:t>— </a:t>
+              <a:t>• </a:t>
             </a:r>
             <a:r>
               <a:rPr sz="1400" b="1">
@@ -9837,7 +9837,7 @@
                 </a:solidFill>
                 <a:latin typeface="Calibri"/>
               </a:rPr>
-              <a:t> In a feedback loop it is the error signal that teaches. The good scientist seeks out and exploits discrepancies — especially his own. “He must not be like Pygmalion and fall in love with his model.”</a:t>
+              <a:t> In a feedback loop it is the error signal that teaches. The good scientist seeks out and exploits discrepancies, especially his own. "He must not be like Pygmalion and fall in love with his model."</a:t>
             </a:r>
           </a:p>
           <a:p>
@@ -9856,7 +9856,7 @@
                 </a:solidFill>
                 <a:latin typeface="Calibri"/>
               </a:rPr>
-              <a:t>— </a:t>
+              <a:t>• </a:t>
             </a:r>
             <a:r>
               <a:rPr sz="1400" b="1">
@@ -9874,7 +9874,7 @@
                 </a:solidFill>
                 <a:latin typeface="Calibri"/>
               </a:rPr>
-              <a:t> “Since all models are wrong the scientist cannot obtain a 'correct' one by excessive elaboration.” Overparameterization is the mark of mediocrity.</a:t>
+              <a:t> "Since all models are wrong the scientist cannot obtain a 'correct' one by excessive elaboration." Overparameterization is the mark of mediocrity.</a:t>
             </a:r>
           </a:p>
           <a:p>
@@ -9893,7 +9893,7 @@
                 </a:solidFill>
                 <a:latin typeface="Calibri"/>
               </a:rPr>
-              <a:t>— </a:t>
+              <a:t>• </a:t>
             </a:r>
             <a:r>
               <a:rPr sz="1400" b="1">
@@ -9911,7 +9911,7 @@
                 </a:solidFill>
                 <a:latin typeface="Calibri"/>
               </a:rPr>
-              <a:t> “Since all models are wrong the scientist must be alert to what is importantly wrong. It is inappropriate to be concerned about mice when there are tigers abroad.”</a:t>
+              <a:t> "Since all models are wrong the scientist must be alert to what is importantly wrong. It is inappropriate to be concerned about mice when there are tigers abroad."</a:t>
             </a:r>
           </a:p>
           <a:p>
@@ -9930,7 +9930,7 @@
                 </a:solidFill>
                 <a:latin typeface="Calibri"/>
               </a:rPr>
-              <a:t>— </a:t>
+              <a:t>• </a:t>
             </a:r>
             <a:r>
               <a:rPr sz="1400" b="1">
@@ -9948,7 +9948,7 @@
                 </a:solidFill>
                 <a:latin typeface="Calibri"/>
               </a:rPr>
-              <a:t> There never was a normal distribution or a straight line in nature — yet assumptions known to be false yield useful approximations. You cannot know a technique is useful unless you use it.</a:t>
+              <a:t> There never was a normal distribution or a straight line in nature. Yet assumptions known to be false still yield useful approximations. You cannot know a technique is useful unless you use it.</a:t>
             </a:r>
           </a:p>
         </p:txBody>
@@ -10097,7 +10097,7 @@
                 </a:solidFill>
                 <a:latin typeface="Calibri"/>
               </a:rPr>
-              <a:t>The famous half-quote in full: all models are wrong — so be parsimonious, and worry about the tigers.</a:t>
+              <a:t>The famous half-quote in full. All models are wrong, so be parsimonious and worry about the tigers.</a:t>
             </a:r>
           </a:p>
         </p:txBody>
@@ -10379,7 +10379,7 @@
                 </a:solidFill>
                 <a:latin typeface="Calibri"/>
               </a:rPr>
-              <a:t>— </a:t>
+              <a:t>• </a:t>
             </a:r>
             <a:r>
               <a:rPr sz="1350" b="1">
@@ -10388,7 +10388,7 @@
                 </a:solidFill>
                 <a:latin typeface="Calibri"/>
               </a:rPr>
-              <a:t>Fisher at Rothamsted, 1919–1928,</a:t>
+              <a:t>Fisher at Rothamsted, 1919-1928,</a:t>
             </a:r>
             <a:r>
               <a:rPr sz="1350">
@@ -10397,7 +10397,7 @@
                 </a:solidFill>
                 <a:latin typeface="Calibri"/>
               </a:rPr>
-              <a:t> as a worked example of the loop: analyzing old Broadbalk records → orthogonal polynomials and residual analysis; rainfall and yield → distributed-lag models; Eden's potato trial → the analysis of variance; the deficiencies of that trial → randomization, replication, blocking, factorials, confounding.</a:t>
+              <a:t> is the worked example. Analyzing old Broadbalk records led to orthogonal polynomials and residual analysis. Rainfall and yield led to distributed-lag models. Eden's potato trial produced the analysis of variance. The deficiencies of that trial produced randomization, replication, blocking, factorials and confounding.</a:t>
             </a:r>
           </a:p>
           <a:p>
@@ -10416,7 +10416,7 @@
                 </a:solidFill>
                 <a:latin typeface="Calibri"/>
               </a:rPr>
-              <a:t>— </a:t>
+              <a:t>• </a:t>
             </a:r>
             <a:r>
               <a:rPr sz="1350" b="1">
@@ -10434,7 +10434,7 @@
                 </a:solidFill>
                 <a:latin typeface="Calibri"/>
               </a:rPr>
-              <a:t> The growth curve in Statistical Methods is his own son; the lady tasting tea was Dr. Muriel Bristol at the Rothamsted tea urn; Tippett's cotton-yarn problem became extreme value theory.</a:t>
+              <a:t> The growth curve in Statistical Methods is his own son. The lady tasting tea was Dr. Muriel Bristol at the Rothamsted tea urn. Tippett's cotton-yarn problem became extreme value theory.</a:t>
             </a:r>
           </a:p>
           <a:p>
@@ -10453,7 +10453,7 @@
                 </a:solidFill>
                 <a:latin typeface="Calibri"/>
               </a:rPr>
-              <a:t>— </a:t>
+              <a:t>• </a:t>
             </a:r>
             <a:r>
               <a:rPr sz="1350" b="1">
@@ -10471,7 +10471,7 @@
                 </a:solidFill>
                 <a:latin typeface="Calibri"/>
               </a:rPr>
-              <a:t> “The statistician's job did not begin when all the work was over — it began long before it was started.” Architect, not curator of dusty relics.</a:t>
+              <a:t> "The statistician's job did not begin when all the work was over. It began long before it was started." Architect, not curator of dusty relics.</a:t>
             </a:r>
           </a:p>
           <a:p>
@@ -10490,7 +10490,7 @@
                 </a:solidFill>
                 <a:latin typeface="Calibri"/>
               </a:rPr>
-              <a:t>— </a:t>
+              <a:t>• </a:t>
             </a:r>
             <a:r>
               <a:rPr sz="1350" b="1">
@@ -10508,7 +10508,7 @@
                 </a:solidFill>
                 <a:latin typeface="Calibri"/>
               </a:rPr>
-              <a:t> Cookbookery — forcing every problem into one or two routine techniques. Mathematistry — theory for theory's sake that redefines the problem rather than solving it, and gets taken seriously by non-statisticians who distrust their own common sense.</a:t>
+              <a:t> Cookbookery forces every problem into one or two routine techniques. Mathematistry is theory for theory's sake, which redefines the problem rather than solving it, and which non-statisticians take seriously because they distrust their own common sense.</a:t>
             </a:r>
           </a:p>
           <a:p>
@@ -10527,7 +10527,7 @@
                 </a:solidFill>
                 <a:latin typeface="Calibri"/>
               </a:rPr>
-              <a:t>— </a:t>
+              <a:t>• </a:t>
             </a:r>
             <a:r>
               <a:rPr sz="1350" b="1">
@@ -10545,7 +10545,7 @@
                 </a:solidFill>
                 <a:latin typeface="Calibri"/>
               </a:rPr>
-              <a:t> Was Fisher an applied statistician, a mathematical statistician, a data analyst, a designer of investigations? He was all of these — “that is why he was much more than the sum of the parts.”</a:t>
+              <a:t> Was Fisher an applied statistician, a mathematical statistician, a data analyst, a designer of investigations? "It is surely because he was all of these that he was much more than the sum of the parts."</a:t>
             </a:r>
           </a:p>
         </p:txBody>
@@ -10694,7 +10694,7 @@
                 </a:solidFill>
                 <a:latin typeface="Calibri"/>
               </a:rPr>
-              <a:t>Train neither theorem-provers nor cookbook users. Statisticians must learn to be good scientists — a talent acquired by experience and example.</a:t>
+              <a:t>Train neither theorem-provers nor cookbook users. Statisticians must learn to be good scientists, a talent acquired by experience and example.</a:t>
             </a:r>
           </a:p>
         </p:txBody>
@@ -10848,7 +10848,7 @@
                 </a:solidFill>
                 <a:latin typeface="Calibri"/>
               </a:rPr>
-              <a:t>A Conversation with George Box — the arc</a:t>
+              <a:t>The arc of the conversation</a:t>
             </a:r>
           </a:p>
         </p:txBody>
@@ -10890,7 +10890,7 @@
                 </a:solidFill>
                 <a:latin typeface="Calibri"/>
               </a:rPr>
-              <a:t>Statistical Science 2(3):239–258. Interviewed at the 1986 joint meetings.</a:t>
+              <a:t>Statistical Science 2(3):239-258. Interviewed at the 1986 joint meetings.</a:t>
             </a:r>
           </a:p>
         </p:txBody>
@@ -11018,7 +11018,7 @@
                 </a:solidFill>
                 <a:latin typeface="Calibri"/>
               </a:rPr>
-              <a:t>— </a:t>
+              <a:t>• </a:t>
             </a:r>
             <a:r>
               <a:rPr sz="1350" b="1">
@@ -11036,7 +11036,7 @@
                 </a:solidFill>
                 <a:latin typeface="Calibri"/>
               </a:rPr>
-              <a:t> British Army chemical-defence station, WWII. Told “we can't get a statistician — what do you know about it?”, he taught himself from Fisher at night and ran the next day's experiments by morning: Graeco-Latin squares on the arms of volunteers burned with mustard gas.</a:t>
+              <a:t> British Army chemical defense station, WWII. Told there was no statistician available and asked "What do you know about it?", he taught himself from Fisher at night and ran the next day's experiments by morning. Graeco-Latin squares on the arms of volunteers burned with mustard gas.</a:t>
             </a:r>
           </a:p>
           <a:p>
@@ -11055,7 +11055,7 @@
                 </a:solidFill>
                 <a:latin typeface="Calibri"/>
               </a:rPr>
-              <a:t>— </a:t>
+              <a:t>• </a:t>
             </a:r>
             <a:r>
               <a:rPr sz="1350" b="1">
@@ -11073,7 +11073,7 @@
                 </a:solidFill>
                 <a:latin typeface="Calibri"/>
               </a:rPr>
-              <a:t> “Mostly what I knew about experimental design I knew from the Army, because learning by doing is the only way I ever learn anything.” Degree at University College after the war; PhD only in 1952, after the papers were already published.</a:t>
+              <a:t> "Mostly what I knew about experimental design I knew from the Army, because learning by doing is the only way I ever learn anything." A degree at University College after the war, and a PhD only in 1952, once the papers were already published.</a:t>
             </a:r>
           </a:p>
           <a:p>
@@ -11092,7 +11092,7 @@
                 </a:solidFill>
                 <a:latin typeface="Calibri"/>
               </a:rPr>
-              <a:t>— </a:t>
+              <a:t>• </a:t>
             </a:r>
             <a:r>
               <a:rPr sz="1350" b="1">
@@ -11101,7 +11101,7 @@
                 </a:solidFill>
                 <a:latin typeface="Calibri"/>
               </a:rPr>
-              <a:t>ICI, 1948–56.</a:t>
+              <a:t>ICI, 1948 to 1956.</a:t>
             </a:r>
             <a:r>
               <a:rPr sz="1350">
@@ -11110,7 +11110,7 @@
                 </a:solidFill>
                 <a:latin typeface="Calibri"/>
               </a:rPr>
-              <a:t> The rubber lab was “a wonderful place for designed experiments.” Real machines misbehaving — a heavy-tailed wear-tester, serially correlated readings — pushed him into robustness, quadratic forms, and likelihood-ratio distributions.</a:t>
+              <a:t> The rubber lab was "a wonderful place for designed experiments." Machines that misbehaved, a heavy-tailed wear-tester and serially correlated readings, pushed him into robustness, quadratic forms and likelihood-ratio distributions.</a:t>
             </a:r>
           </a:p>
           <a:p>
@@ -11129,7 +11129,7 @@
                 </a:solidFill>
                 <a:latin typeface="Calibri"/>
               </a:rPr>
-              <a:t>— </a:t>
+              <a:t>• </a:t>
             </a:r>
             <a:r>
               <a:rPr sz="1350" b="1">
@@ -11147,7 +11147,7 @@
                 </a:solidFill>
                 <a:latin typeface="Calibri"/>
               </a:rPr>
-              <a:t> Steepest ascent with K. B. Wilson; then a full-scale 2³ that came back with tiny main effects and huge interactions. Rather than give up, he added centre and axial points — inventing the composite design on the spot — and found the process sat on a ridge. Rotatability followed with Stu Hunter.</a:t>
+              <a:t> Steepest ascent with K. B. Wilson. Then a full-scale 2^3 came back with tiny main effects and huge interactions. Rather than give up, he added center and axial points, inventing the composite design on the spot, and found the process sat on a ridge. Rotatability followed with Stu Hunter.</a:t>
             </a:r>
           </a:p>
           <a:p>
@@ -11166,7 +11166,7 @@
                 </a:solidFill>
                 <a:latin typeface="Calibri"/>
               </a:rPr>
-              <a:t>— </a:t>
+              <a:t>• </a:t>
             </a:r>
             <a:r>
               <a:rPr sz="1350" b="1">
@@ -11175,7 +11175,7 @@
                 </a:solidFill>
                 <a:latin typeface="Calibri"/>
               </a:rPr>
-              <a:t>Then Princeton (1957–59) and Madison,</a:t>
+              <a:t>Then Princeton, 1957 to 1959, and Madison,</a:t>
             </a:r>
             <a:r>
               <a:rPr sz="1350">
@@ -11184,7 +11184,7 @@
                 </a:solidFill>
                 <a:latin typeface="Calibri"/>
               </a:rPr>
-              <a:t> where he founded the department in 1960 and insisted on genuine joint appointments with medicine, engineering, and business.</a:t>
+              <a:t> where he founded the department in 1960 and insisted on genuine joint appointments with medicine, engineering and business.</a:t>
             </a:r>
           </a:p>
         </p:txBody>
@@ -11333,7 +11333,7 @@
                 </a:solidFill>
                 <a:latin typeface="Calibri"/>
               </a:rPr>
-              <a:t>Every method he is famous for was pulled out of a concrete problem that refused to behave — the loop from the 1976 paper, run on his own life.</a:t>
+              <a:t>Every method he is famous for came out of a concrete problem that refused to behave. The loop from the 1976 paper, run on his own life.</a:t>
             </a:r>
           </a:p>
         </p:txBody>
